--- a/output/LINK. voorstel Kubus Heerenveen.pptx
+++ b/output/LINK. voorstel Kubus Heerenveen.pptx
@@ -7871,7 +7871,7 @@
                 <a:ea typeface="Arial" pitchFamily="34" charset="-122"/>
                 <a:cs typeface="Arial" pitchFamily="34" charset="-120"/>
               </a:rPr>
-              <a:t>Twaalf weken bellen</a:t>
+              <a:t>Looptijd van twaalf weken</a:t>
             </a:r>
             <a:endParaRPr lang="en-US" sz="1150" dirty="0"/>
           </a:p>
@@ -7913,7 +7913,7 @@
                 <a:ea typeface="Arial" pitchFamily="34" charset="-122"/>
                 <a:cs typeface="Arial" pitchFamily="34" charset="-120"/>
               </a:rPr>
-              <a:t>We bellen op de dagen en dagdelen die in onze data het beste werken voor jullie branche, met een regionaal nummer op jullie naam. Elke week een rapportage, om de week evaluatie. Gaat het makkelijker of juist moeizamer, dan zitten we eerder om tafel en schakelen we direct.</a:t>
+              <a:t>De pilot loopt twaalf weken. We bellen daarin op de dagen en dagdelen die in onze data het beste werken voor jullie branche, met een regionaal nummer op jullie naam. Elke week een rapportage, om de week evaluatie.</a:t>
             </a:r>
             <a:endParaRPr lang="en-US" sz="875" dirty="0"/>
           </a:p>
@@ -8501,7 +8501,7 @@
                 <a:ea typeface="Arial" pitchFamily="34" charset="-122"/>
                 <a:cs typeface="Arial" pitchFamily="34" charset="-120"/>
               </a:rPr>
-              <a:t>Twaalf weken bellen op de beste momenten</a:t>
+              <a:t>Beldagen binnen een looptijd van 12 weken</a:t>
             </a:r>
             <a:endParaRPr lang="en-US" sz="900" dirty="0"/>
           </a:p>

--- a/output/LINK. voorstel Kubus Heerenveen.pptx
+++ b/output/LINK. voorstel Kubus Heerenveen.pptx
@@ -4068,7 +4068,7 @@
                 <a:ea typeface="Arial" pitchFamily="34" charset="-122"/>
                 <a:cs typeface="Arial" pitchFamily="34" charset="-120"/>
               </a:rPr>
-              <a:t>Eén persoon die jullie campagne kent, van script tot rapportage.</a:t>
+              <a:t>Eén persoon die jullie campagne kent, van kick-off tot rapportage.</a:t>
             </a:r>
             <a:endParaRPr lang="en-US" sz="950" dirty="0"/>
           </a:p>
@@ -5541,7 +5541,7 @@
                 <a:ea typeface="Arial" pitchFamily="34" charset="-122"/>
                 <a:cs typeface="Arial" pitchFamily="34" charset="-120"/>
               </a:rPr>
-              <a:t>Samen scherp: doelgroep, beslisser, propositie, bezwaren en wat een goede afspraak voor jullie is. Wij schrijven het belscript, jullie keuren goed.</a:t>
+              <a:t>Samen scherp: doelgroep, beslisser, propositie, bezwaren en wat een goede afspraak voor jullie is. Wij leggen de USP's en de opbouw van het gesprek vast, jullie keuren goed.</a:t>
             </a:r>
             <a:endParaRPr lang="en-US" sz="900" dirty="0"/>
           </a:p>
@@ -7527,7 +7527,7 @@
                 <a:ea typeface="Arial" pitchFamily="34" charset="-122"/>
                 <a:cs typeface="Arial" pitchFamily="34" charset="-120"/>
               </a:rPr>
-              <a:t>Kick-off en belscript</a:t>
+              <a:t>Kick-off en USP's</a:t>
             </a:r>
             <a:endParaRPr lang="en-US" sz="1150" dirty="0"/>
           </a:p>
@@ -7569,7 +7569,7 @@
                 <a:ea typeface="Arial" pitchFamily="34" charset="-122"/>
                 <a:cs typeface="Arial" pitchFamily="34" charset="-120"/>
               </a:rPr>
-              <a:t>Samen scherp wat we gaan vertellen en bij wie. Wij schrijven het belscript, jullie keuren het goed.</a:t>
+              <a:t>Samen scherp wat we gaan vertellen en bij wie. Wij leggen de USP's vast, jullie keuren ze goed.</a:t>
             </a:r>
             <a:endParaRPr lang="en-US" sz="875" dirty="0"/>
           </a:p>
@@ -8288,7 +8288,7 @@
         <p:spPr>
           <a:xfrm>
             <a:off x="3733791" y="5245087"/>
-            <a:ext cx="3555991" cy="215899"/>
+            <a:ext cx="3746491" cy="215899"/>
           </a:xfrm>
           <a:prstGeom prst="rect">
             <a:avLst/>
@@ -8312,7 +8312,7 @@
                 <a:ea typeface="Arial" pitchFamily="34" charset="-122"/>
                 <a:cs typeface="Arial" pitchFamily="34" charset="-120"/>
               </a:rPr>
-              <a:t>Kick-off en belscript</a:t>
+              <a:t>Kick-off en USP's</a:t>
             </a:r>
             <a:endParaRPr lang="en-US" sz="900" dirty="0"/>
           </a:p>
@@ -8334,7 +8334,7 @@
         </p:blipFill>
         <p:spPr>
           <a:xfrm>
-            <a:off x="7340582" y="5276837"/>
+            <a:off x="7556481" y="5276837"/>
             <a:ext cx="127000" cy="127000"/>
           </a:xfrm>
           <a:prstGeom prst="rect">
@@ -8350,8 +8350,8 @@
         </p:nvSpPr>
         <p:spPr>
           <a:xfrm>
-            <a:off x="7543781" y="5245087"/>
-            <a:ext cx="3555991" cy="215899"/>
+            <a:off x="7759681" y="5245087"/>
+            <a:ext cx="3746491" cy="215899"/>
           </a:xfrm>
           <a:prstGeom prst="rect">
             <a:avLst/>
@@ -8414,7 +8414,7 @@
         <p:spPr>
           <a:xfrm>
             <a:off x="3733791" y="5499086"/>
-            <a:ext cx="3555991" cy="215899"/>
+            <a:ext cx="3746491" cy="215899"/>
           </a:xfrm>
           <a:prstGeom prst="rect">
             <a:avLst/>
@@ -8460,7 +8460,7 @@
         </p:blipFill>
         <p:spPr>
           <a:xfrm>
-            <a:off x="7340582" y="5530836"/>
+            <a:off x="7556481" y="5530836"/>
             <a:ext cx="127000" cy="127000"/>
           </a:xfrm>
           <a:prstGeom prst="rect">
@@ -8476,8 +8476,8 @@
         </p:nvSpPr>
         <p:spPr>
           <a:xfrm>
-            <a:off x="7543781" y="5499086"/>
-            <a:ext cx="3555991" cy="215899"/>
+            <a:off x="7759681" y="5499086"/>
+            <a:ext cx="3746491" cy="215899"/>
           </a:xfrm>
           <a:prstGeom prst="rect">
             <a:avLst/>
@@ -8540,7 +8540,7 @@
         <p:spPr>
           <a:xfrm>
             <a:off x="3733791" y="5753086"/>
-            <a:ext cx="3555991" cy="215899"/>
+            <a:ext cx="3746491" cy="215899"/>
           </a:xfrm>
           <a:prstGeom prst="rect">
             <a:avLst/>
@@ -8586,7 +8586,7 @@
         </p:blipFill>
         <p:spPr>
           <a:xfrm>
-            <a:off x="7340582" y="5784836"/>
+            <a:off x="7556481" y="5784836"/>
             <a:ext cx="127000" cy="127000"/>
           </a:xfrm>
           <a:prstGeom prst="rect">
@@ -8602,8 +8602,8 @@
         </p:nvSpPr>
         <p:spPr>
           <a:xfrm>
-            <a:off x="7543781" y="5753086"/>
-            <a:ext cx="3555991" cy="215899"/>
+            <a:off x="7759681" y="5753086"/>
+            <a:ext cx="3746491" cy="215899"/>
           </a:xfrm>
           <a:prstGeom prst="rect">
             <a:avLst/>
@@ -10335,7 +10335,7 @@
                 <a:ea typeface="Arial" pitchFamily="34" charset="-122"/>
                 <a:cs typeface="Arial" pitchFamily="34" charset="-120"/>
               </a:rPr>
-              <a:t>Goedkeuring belscript</a:t>
+              <a:t>Goedkeuring op de USP's</a:t>
             </a:r>
             <a:endParaRPr lang="en-US" sz="1450" dirty="0"/>
           </a:p>
